--- a/3-Master_Plan/re_entry/HEROs_and_PASSes/slides/auto/CHAR_gamma_characterization_AUTO.pptx
+++ b/3-Master_Plan/re_entry/HEROs_and_PASSes/slides/auto/CHAR_gamma_characterization_AUTO.pptx
@@ -3311,7 +3311,7 @@
       </p:sp>
       <p:pic>
         <p:nvPicPr>
-          <p:cNvPr id="4" name="Picture 3" descr="GAMMA_sweep_lambda_curves.png"/>
+          <p:cNvPr id="4" name="Picture 3" descr="GAMMA_sweep_lambda_curves_key_arms.png"/>
           <p:cNvPicPr>
             <a:picLocks noChangeAspect="1"/>
           </p:cNvPicPr>
@@ -3325,8 +3325,8 @@
         </p:blipFill>
         <p:spPr>
           <a:xfrm>
-            <a:off x="4773168" y="768096"/>
-            <a:ext cx="7007047" cy="2393962"/>
+            <a:off x="6476591" y="768096"/>
+            <a:ext cx="3600201" cy="3895344"/>
           </a:xfrm>
           <a:prstGeom prst="rect">
             <a:avLst/>
@@ -3408,46 +3408,18 @@
               </a:spcAft>
             </a:pPr>
             <a:r>
+              <a:rPr sz="900"/>
+              <a:t>Figure uses key arms </a:t>
+            </a:r>
+            <a:r>
               <a:rPr sz="900" i="1">
                 <a:latin typeface="Cambria Math"/>
               </a:rPr>
-              <a:t>\gamma=5</a:t>
+              <a:t>λ ∈ {0, 0.55, 1.0}</a:t>
             </a:r>
             <a:r>
               <a:rPr sz="900"/>
-              <a:t>: </a:t>
-            </a:r>
-            <a:r>
-              <a:rPr sz="900" i="1">
-                <a:latin typeface="Cambria Math"/>
-              </a:rPr>
-              <a:t>λ</a:t>
-            </a:r>
-            <a:r>
-              <a:rPr sz="800" i="1" baseline="-25000">
-                <a:latin typeface="Cambria Math"/>
-              </a:rPr>
-              <a:t>crit</a:t>
-            </a:r>
-            <a:r>
-              <a:rPr sz="900" i="1">
-                <a:latin typeface="Cambria Math"/>
-              </a:rPr>
-              <a:t>\approx 0.8</a:t>
-            </a:r>
-            <a:r>
-              <a:rPr sz="900"/>
-              <a:t> — hump needs larger </a:t>
-            </a:r>
-            <a:r>
-              <a:rPr sz="900" i="1">
-                <a:latin typeface="Cambria Math"/>
-              </a:rPr>
-              <a:t>λ</a:t>
-            </a:r>
-            <a:r>
-              <a:rPr sz="900"/>
-              <a:t>.</a:t>
+              <a:t> — full five-arm grid in \texttt{GAMMA\_sweep\_lambda\_curves.png}.</a:t>
             </a:r>
           </a:p>
           <a:p>
@@ -3463,11 +3435,11 @@
               <a:rPr sz="900" i="1">
                 <a:latin typeface="Cambria Math"/>
               </a:rPr>
-              <a:t>\gamma=10</a:t>
+              <a:t>\gamma=5</a:t>
             </a:r>
             <a:r>
               <a:rPr sz="900"/>
-              <a:t> (539): </a:t>
+              <a:t>: </a:t>
             </a:r>
             <a:r>
               <a:rPr sz="900" i="1">
@@ -3485,17 +3457,17 @@
               <a:rPr sz="900" i="1">
                 <a:latin typeface="Cambria Math"/>
               </a:rPr>
-              <a:t>\approx 0.4</a:t>
+              <a:t>≈ 0.8</a:t>
             </a:r>
             <a:r>
               <a:rPr sz="900"/>
-              <a:t> — curve morph near </a:t>
+              <a:t> — hump needs larger </a:t>
             </a:r>
             <a:r>
               <a:rPr sz="900" i="1">
                 <a:latin typeface="Cambria Math"/>
               </a:rPr>
-              <a:t>λ \gtrsim 0.4</a:t>
+              <a:t>λ</a:t>
             </a:r>
             <a:r>
               <a:rPr sz="900"/>
@@ -3515,11 +3487,11 @@
               <a:rPr sz="900" i="1">
                 <a:latin typeface="Cambria Math"/>
               </a:rPr>
-              <a:t>\gamma=20</a:t>
+              <a:t>\gamma=10</a:t>
             </a:r>
             <a:r>
               <a:rPr sz="900"/>
-              <a:t>: </a:t>
+              <a:t> (539): </a:t>
             </a:r>
             <a:r>
               <a:rPr sz="900" i="1">
@@ -3537,17 +3509,17 @@
               <a:rPr sz="900" i="1">
                 <a:latin typeface="Cambria Math"/>
               </a:rPr>
-              <a:t>\approx 0.2</a:t>
+              <a:t>≈ 0.4</a:t>
             </a:r>
             <a:r>
               <a:rPr sz="900"/>
-              <a:t> — congestion reorders at modest </a:t>
+              <a:t> — curve morph near </a:t>
             </a:r>
             <a:r>
               <a:rPr sz="900" i="1">
                 <a:latin typeface="Cambria Math"/>
               </a:rPr>
-              <a:t>λ</a:t>
+              <a:t>λ \gtrsim 0.4</a:t>
             </a:r>
             <a:r>
               <a:rPr sz="900"/>
@@ -3661,7 +3633,7 @@
               <a:rPr sz="1100" i="1">
                 <a:latin typeface="Cambria Math"/>
               </a:rPr>
-              <a:t> \approx 4/\gamma</a:t>
+              <a:t> ≈ 4/\gamma</a:t>
             </a:r>
             <a:r>
               <a:rPr sz="1100"/>
@@ -3743,7 +3715,7 @@
               <a:rPr sz="2000" i="1">
                 <a:latin typeface="Cambria Math"/>
               </a:rPr>
-              <a:t> \approx 4/\gamma</a:t>
+              <a:t> ≈ 4/\gamma</a:t>
             </a:r>
             <a:r>
               <a:rPr sz="2000"/>
@@ -3983,7 +3955,7 @@
         <p:spPr>
           <a:xfrm>
             <a:off x="4773168" y="768096"/>
-            <a:ext cx="7007047" cy="3186656"/>
+            <a:ext cx="7007047" cy="3177248"/>
           </a:xfrm>
           <a:prstGeom prst="rect">
             <a:avLst/>
@@ -4314,7 +4286,7 @@
               <a:rPr sz="1100" i="1">
                 <a:latin typeface="Cambria Math"/>
               </a:rPr>
-              <a:t> \approx 4/\gamma</a:t>
+              <a:t> ≈ 4/\gamma</a:t>
             </a:r>
             <a:r>
               <a:rPr sz="1100"/>

--- a/3-Master_Plan/re_entry/HEROs_and_PASSes/slides/auto/CHAR_gamma_characterization_AUTO.pptx
+++ b/3-Master_Plan/re_entry/HEROs_and_PASSes/slides/auto/CHAR_gamma_characterization_AUTO.pptx
@@ -3955,7 +3955,7 @@
         <p:spPr>
           <a:xfrm>
             <a:off x="4773168" y="768096"/>
-            <a:ext cx="7007047" cy="3177248"/>
+            <a:ext cx="7007047" cy="3186656"/>
           </a:xfrm>
           <a:prstGeom prst="rect">
             <a:avLst/>
